--- a/utils/grip_params_schematic.pptx
+++ b/utils/grip_params_schematic.pptx
@@ -104,6 +104,11 @@
       </a:defRPr>
     </a:lvl9pPr>
   </p:defaultTextStyle>
+  <p:extLst>
+    <p:ext uri="{EFAFB233-063F-42B5-8137-9DF3F51BA10A}">
+      <p15:sldGuideLst xmlns:p15="http://schemas.microsoft.com/office/powerpoint/2012/main"/>
+    </p:ext>
+  </p:extLst>
 </p:presentation>
 </file>
 
@@ -3638,15 +3643,15 @@
             </a:r>
             <a:r>
               <a:rPr lang="en-US" sz="1400" dirty="0"/>
-              <a:t>(space </a:t>
-            </a:r>
-            <a:r>
-              <a:rPr lang="en-US" sz="1400" dirty="0" err="1"/>
-              <a:t>btwn</a:t>
+              <a:t>(</a:t>
+            </a:r>
+            <a:r>
+              <a:rPr lang="en-US" sz="1400"/>
+              <a:t>space between </a:t>
             </a:r>
             <a:r>
               <a:rPr lang="en-US" sz="1400" dirty="0"/>
-              <a:t> slabs)</a:t>
+              <a:t>slabs)</a:t>
             </a:r>
           </a:p>
         </p:txBody>
@@ -4256,7 +4261,19 @@
             </a:r>
             <a:r>
               <a:rPr lang="en-US" sz="1400" dirty="0"/>
-              <a:t> (for relaxation)</a:t>
+              <a:t> (for relaxation and included in </a:t>
+            </a:r>
+            <a:r>
+              <a:rPr lang="en-US" sz="1400" i="1" dirty="0"/>
+              <a:t>E</a:t>
+            </a:r>
+            <a:r>
+              <a:rPr lang="en-US" sz="1400" baseline="-25000" dirty="0"/>
+              <a:t>gb</a:t>
+            </a:r>
+            <a:r>
+              <a:rPr lang="en-US" sz="1400" dirty="0"/>
+              <a:t> calculation)</a:t>
             </a:r>
           </a:p>
         </p:txBody>
@@ -4342,7 +4359,19 @@
             </a:r>
             <a:r>
               <a:rPr lang="en-US" sz="1400" dirty="0"/>
-              <a:t> (for relaxation)</a:t>
+              <a:t> (for relaxation and included in </a:t>
+            </a:r>
+            <a:r>
+              <a:rPr lang="en-US" sz="1400" i="1" dirty="0"/>
+              <a:t>E</a:t>
+            </a:r>
+            <a:r>
+              <a:rPr lang="en-US" sz="1400" baseline="-25000" dirty="0"/>
+              <a:t>gb</a:t>
+            </a:r>
+            <a:r>
+              <a:rPr lang="en-US" sz="1400" dirty="0"/>
+              <a:t> calculation)</a:t>
             </a:r>
           </a:p>
         </p:txBody>

--- a/utils/grip_params_schematic.pptx
+++ b/utils/grip_params_schematic.pptx
@@ -3643,15 +3643,7 @@
             </a:r>
             <a:r>
               <a:rPr lang="en-US" sz="1400" dirty="0"/>
-              <a:t>(</a:t>
-            </a:r>
-            <a:r>
-              <a:rPr lang="en-US" sz="1400"/>
-              <a:t>space between </a:t>
-            </a:r>
-            <a:r>
-              <a:rPr lang="en-US" sz="1400" dirty="0"/>
-              <a:t>slabs)</a:t>
+              <a:t>(space between slabs)</a:t>
             </a:r>
           </a:p>
         </p:txBody>
